--- a/src/TUTs/w3/tutorial_opencv_w3.pptx
+++ b/src/TUTs/w3/tutorial_opencv_w3.pptx
@@ -312,7 +312,7 @@
           <a:p>
             <a:fld id="{85443296-031B-4E62-BD23-3AACAECB7C3D}" type="datetimeFigureOut">
               <a:rPr lang="en-US" smtClean="0"/>
-              <a:t>9/18/2026</a:t>
+              <a:t>9/26/2026</a:t>
             </a:fld>
             <a:endParaRPr lang="en-US"/>
           </a:p>
@@ -3280,7 +3280,7 @@
           <a:p>
             <a:fld id="{556997A6-5606-401B-9D95-BD09845BE62F}" type="datetimeFigureOut">
               <a:rPr lang="en-US" smtClean="0"/>
-              <a:t>9/18/2026</a:t>
+              <a:t>9/26/2026</a:t>
             </a:fld>
             <a:endParaRPr lang="en-US"/>
           </a:p>
@@ -3478,7 +3478,7 @@
           <a:p>
             <a:fld id="{556997A6-5606-401B-9D95-BD09845BE62F}" type="datetimeFigureOut">
               <a:rPr lang="en-US" smtClean="0"/>
-              <a:t>9/18/2026</a:t>
+              <a:t>9/26/2026</a:t>
             </a:fld>
             <a:endParaRPr lang="en-US"/>
           </a:p>
@@ -3686,7 +3686,7 @@
           <a:p>
             <a:fld id="{556997A6-5606-401B-9D95-BD09845BE62F}" type="datetimeFigureOut">
               <a:rPr lang="en-US" smtClean="0"/>
-              <a:t>9/18/2026</a:t>
+              <a:t>9/26/2026</a:t>
             </a:fld>
             <a:endParaRPr lang="en-US"/>
           </a:p>
@@ -3884,7 +3884,7 @@
           <a:p>
             <a:fld id="{556997A6-5606-401B-9D95-BD09845BE62F}" type="datetimeFigureOut">
               <a:rPr lang="en-US" smtClean="0"/>
-              <a:t>9/18/2026</a:t>
+              <a:t>9/26/2026</a:t>
             </a:fld>
             <a:endParaRPr lang="en-US"/>
           </a:p>
@@ -4159,7 +4159,7 @@
           <a:p>
             <a:fld id="{556997A6-5606-401B-9D95-BD09845BE62F}" type="datetimeFigureOut">
               <a:rPr lang="en-US" smtClean="0"/>
-              <a:t>9/18/2026</a:t>
+              <a:t>9/26/2026</a:t>
             </a:fld>
             <a:endParaRPr lang="en-US"/>
           </a:p>
@@ -4424,7 +4424,7 @@
           <a:p>
             <a:fld id="{556997A6-5606-401B-9D95-BD09845BE62F}" type="datetimeFigureOut">
               <a:rPr lang="en-US" smtClean="0"/>
-              <a:t>9/18/2026</a:t>
+              <a:t>9/26/2026</a:t>
             </a:fld>
             <a:endParaRPr lang="en-US"/>
           </a:p>
@@ -4836,7 +4836,7 @@
           <a:p>
             <a:fld id="{556997A6-5606-401B-9D95-BD09845BE62F}" type="datetimeFigureOut">
               <a:rPr lang="en-US" smtClean="0"/>
-              <a:t>9/18/2026</a:t>
+              <a:t>9/26/2026</a:t>
             </a:fld>
             <a:endParaRPr lang="en-US"/>
           </a:p>
@@ -4977,7 +4977,7 @@
           <a:p>
             <a:fld id="{556997A6-5606-401B-9D95-BD09845BE62F}" type="datetimeFigureOut">
               <a:rPr lang="en-US" smtClean="0"/>
-              <a:t>9/18/2026</a:t>
+              <a:t>9/26/2026</a:t>
             </a:fld>
             <a:endParaRPr lang="en-US"/>
           </a:p>
@@ -5090,7 +5090,7 @@
           <a:p>
             <a:fld id="{556997A6-5606-401B-9D95-BD09845BE62F}" type="datetimeFigureOut">
               <a:rPr lang="en-US" smtClean="0"/>
-              <a:t>9/18/2026</a:t>
+              <a:t>9/26/2026</a:t>
             </a:fld>
             <a:endParaRPr lang="en-US"/>
           </a:p>
@@ -5401,7 +5401,7 @@
           <a:p>
             <a:fld id="{556997A6-5606-401B-9D95-BD09845BE62F}" type="datetimeFigureOut">
               <a:rPr lang="en-US" smtClean="0"/>
-              <a:t>9/18/2026</a:t>
+              <a:t>9/26/2026</a:t>
             </a:fld>
             <a:endParaRPr lang="en-US"/>
           </a:p>
@@ -5689,7 +5689,7 @@
           <a:p>
             <a:fld id="{556997A6-5606-401B-9D95-BD09845BE62F}" type="datetimeFigureOut">
               <a:rPr lang="en-US" smtClean="0"/>
-              <a:t>9/18/2026</a:t>
+              <a:t>9/26/2026</a:t>
             </a:fld>
             <a:endParaRPr lang="en-US"/>
           </a:p>
@@ -5930,7 +5930,7 @@
           <a:p>
             <a:fld id="{556997A6-5606-401B-9D95-BD09845BE62F}" type="datetimeFigureOut">
               <a:rPr lang="en-US" smtClean="0"/>
-              <a:t>9/18/2026</a:t>
+              <a:t>9/26/2026</a:t>
             </a:fld>
             <a:endParaRPr lang="en-US"/>
           </a:p>
@@ -11688,7 +11688,25 @@
                 </a:solidFill>
                 <a:latin typeface="Lucida Console" panose="020B0609040504020204" pitchFamily="49" charset="0"/>
               </a:rPr>
-              <a:t># convert the unit8 values to float (cv2.kmeans requirement)</a:t>
+              <a:t># convert </a:t>
+            </a:r>
+            <a:r>
+              <a:rPr lang="en-US" altLang="en-US">
+                <a:solidFill>
+                  <a:schemeClr val="folHlink"/>
+                </a:solidFill>
+                <a:latin typeface="Lucida Console" panose="020B0609040504020204" pitchFamily="49" charset="0"/>
+              </a:rPr>
+              <a:t>the uint8 </a:t>
+            </a:r>
+            <a:r>
+              <a:rPr lang="en-US" altLang="en-US" dirty="0">
+                <a:solidFill>
+                  <a:schemeClr val="folHlink"/>
+                </a:solidFill>
+                <a:latin typeface="Lucida Console" panose="020B0609040504020204" pitchFamily="49" charset="0"/>
+              </a:rPr>
+              <a:t>values to float (cv2.kmeans requirement)</a:t>
             </a:r>
           </a:p>
           <a:p>
